--- a/AI_규정통합검색시스템_소개.pptx
+++ b/AI_규정통합검색시스템_소개.pptx
@@ -3163,7 +3163,7 @@
       </p:sp>
       <p:pic>
         <p:nvPicPr>
-          <p:cNvPr id="3" name="Picture 2" descr="gnu_signature_kr_en_white.png"/>
+          <p:cNvPr id="3" name="Picture 2" descr="gnu_emblem_combo_kr_en_white.png"/>
           <p:cNvPicPr>
             <a:picLocks noChangeAspect="1"/>
           </p:cNvPicPr>
@@ -3178,7 +3178,7 @@
         <p:spPr>
           <a:xfrm>
             <a:off x="548640" y="548640"/>
-            <a:ext cx="3868615" cy="502920"/>
+            <a:ext cx="2076944" cy="502920"/>
           </a:xfrm>
           <a:prstGeom prst="rect">
             <a:avLst/>
@@ -3588,7 +3588,7 @@
       </p:sp>
       <p:pic>
         <p:nvPicPr>
-          <p:cNvPr id="6" name="Picture 5" descr="gnu_signature_kr_en.png"/>
+          <p:cNvPr id="6" name="Picture 5" descr="gnu_emblem_combo_kr_en.png"/>
           <p:cNvPicPr>
             <a:picLocks noChangeAspect="1"/>
           </p:cNvPicPr>
@@ -3603,7 +3603,7 @@
         <p:spPr>
           <a:xfrm>
             <a:off x="9357055" y="384048"/>
-            <a:ext cx="2532185" cy="329184"/>
+            <a:ext cx="1359455" cy="329184"/>
           </a:xfrm>
           <a:prstGeom prst="rect">
             <a:avLst/>
@@ -4572,7 +4572,7 @@
       </p:sp>
       <p:pic>
         <p:nvPicPr>
-          <p:cNvPr id="6" name="Picture 5" descr="gnu_signature_kr_en.png"/>
+          <p:cNvPr id="6" name="Picture 5" descr="gnu_emblem_combo_kr_en.png"/>
           <p:cNvPicPr>
             <a:picLocks noChangeAspect="1"/>
           </p:cNvPicPr>
@@ -4587,7 +4587,7 @@
         <p:spPr>
           <a:xfrm>
             <a:off x="9357055" y="384048"/>
-            <a:ext cx="2532185" cy="329184"/>
+            <a:ext cx="1359455" cy="329184"/>
           </a:xfrm>
           <a:prstGeom prst="rect">
             <a:avLst/>
@@ -5133,7 +5133,7 @@
       </p:sp>
       <p:pic>
         <p:nvPicPr>
-          <p:cNvPr id="6" name="Picture 5" descr="gnu_signature_kr_en.png"/>
+          <p:cNvPr id="6" name="Picture 5" descr="gnu_emblem_combo_kr_en.png"/>
           <p:cNvPicPr>
             <a:picLocks noChangeAspect="1"/>
           </p:cNvPicPr>
@@ -5148,7 +5148,7 @@
         <p:spPr>
           <a:xfrm>
             <a:off x="9357055" y="384048"/>
-            <a:ext cx="2532185" cy="329184"/>
+            <a:ext cx="1359455" cy="329184"/>
           </a:xfrm>
           <a:prstGeom prst="rect">
             <a:avLst/>
@@ -5694,7 +5694,7 @@
       </p:sp>
       <p:pic>
         <p:nvPicPr>
-          <p:cNvPr id="6" name="Picture 5" descr="gnu_signature_kr_en.png"/>
+          <p:cNvPr id="6" name="Picture 5" descr="gnu_emblem_combo_kr_en.png"/>
           <p:cNvPicPr>
             <a:picLocks noChangeAspect="1"/>
           </p:cNvPicPr>
@@ -5709,7 +5709,7 @@
         <p:spPr>
           <a:xfrm>
             <a:off x="9357055" y="384048"/>
-            <a:ext cx="2532185" cy="329184"/>
+            <a:ext cx="1359455" cy="329184"/>
           </a:xfrm>
           <a:prstGeom prst="rect">
             <a:avLst/>
@@ -6433,7 +6433,7 @@
       </p:sp>
       <p:pic>
         <p:nvPicPr>
-          <p:cNvPr id="6" name="Picture 5" descr="gnu_signature_kr_en.png"/>
+          <p:cNvPr id="6" name="Picture 5" descr="gnu_emblem_combo_kr_en.png"/>
           <p:cNvPicPr>
             <a:picLocks noChangeAspect="1"/>
           </p:cNvPicPr>
@@ -6448,7 +6448,7 @@
         <p:spPr>
           <a:xfrm>
             <a:off x="9357055" y="384048"/>
-            <a:ext cx="2532185" cy="329184"/>
+            <a:ext cx="1359455" cy="329184"/>
           </a:xfrm>
           <a:prstGeom prst="rect">
             <a:avLst/>
@@ -6940,7 +6940,7 @@
       </p:sp>
       <p:pic>
         <p:nvPicPr>
-          <p:cNvPr id="6" name="Picture 5" descr="gnu_signature_kr_en.png"/>
+          <p:cNvPr id="6" name="Picture 5" descr="gnu_emblem_combo_kr_en.png"/>
           <p:cNvPicPr>
             <a:picLocks noChangeAspect="1"/>
           </p:cNvPicPr>
@@ -6955,7 +6955,7 @@
         <p:spPr>
           <a:xfrm>
             <a:off x="9357055" y="384048"/>
-            <a:ext cx="2532185" cy="329184"/>
+            <a:ext cx="1359455" cy="329184"/>
           </a:xfrm>
           <a:prstGeom prst="rect">
             <a:avLst/>
@@ -7569,7 +7569,7 @@
       </p:sp>
       <p:pic>
         <p:nvPicPr>
-          <p:cNvPr id="6" name="Picture 5" descr="gnu_signature_kr_en.png"/>
+          <p:cNvPr id="6" name="Picture 5" descr="gnu_emblem_combo_kr_en.png"/>
           <p:cNvPicPr>
             <a:picLocks noChangeAspect="1"/>
           </p:cNvPicPr>
@@ -7584,7 +7584,7 @@
         <p:spPr>
           <a:xfrm>
             <a:off x="9357055" y="384048"/>
-            <a:ext cx="2532185" cy="329184"/>
+            <a:ext cx="1359455" cy="329184"/>
           </a:xfrm>
           <a:prstGeom prst="rect">
             <a:avLst/>
@@ -8146,7 +8146,7 @@
       </p:sp>
       <p:pic>
         <p:nvPicPr>
-          <p:cNvPr id="6" name="Picture 5" descr="gnu_signature_kr_en.png"/>
+          <p:cNvPr id="6" name="Picture 5" descr="gnu_emblem_combo_kr_en.png"/>
           <p:cNvPicPr>
             <a:picLocks noChangeAspect="1"/>
           </p:cNvPicPr>
@@ -8161,7 +8161,7 @@
         <p:spPr>
           <a:xfrm>
             <a:off x="9357055" y="384048"/>
-            <a:ext cx="2532185" cy="329184"/>
+            <a:ext cx="1359455" cy="329184"/>
           </a:xfrm>
           <a:prstGeom prst="rect">
             <a:avLst/>
@@ -9024,7 +9024,7 @@
       </p:sp>
       <p:pic>
         <p:nvPicPr>
-          <p:cNvPr id="6" name="Picture 5" descr="gnu_signature_kr_en.png"/>
+          <p:cNvPr id="6" name="Picture 5" descr="gnu_emblem_combo_kr_en.png"/>
           <p:cNvPicPr>
             <a:picLocks noChangeAspect="1"/>
           </p:cNvPicPr>
@@ -9039,7 +9039,7 @@
         <p:spPr>
           <a:xfrm>
             <a:off x="9357055" y="384048"/>
-            <a:ext cx="2532185" cy="329184"/>
+            <a:ext cx="1359455" cy="329184"/>
           </a:xfrm>
           <a:prstGeom prst="rect">
             <a:avLst/>
@@ -9926,7 +9926,7 @@
       </p:sp>
       <p:pic>
         <p:nvPicPr>
-          <p:cNvPr id="6" name="Picture 5" descr="gnu_signature_kr_en.png"/>
+          <p:cNvPr id="6" name="Picture 5" descr="gnu_emblem_combo_kr_en.png"/>
           <p:cNvPicPr>
             <a:picLocks noChangeAspect="1"/>
           </p:cNvPicPr>
@@ -9941,7 +9941,7 @@
         <p:spPr>
           <a:xfrm>
             <a:off x="9357055" y="384048"/>
-            <a:ext cx="2532185" cy="329184"/>
+            <a:ext cx="1359455" cy="329184"/>
           </a:xfrm>
           <a:prstGeom prst="rect">
             <a:avLst/>
@@ -10800,7 +10800,7 @@
       </p:sp>
       <p:pic>
         <p:nvPicPr>
-          <p:cNvPr id="6" name="Picture 5" descr="gnu_signature_kr_en.png"/>
+          <p:cNvPr id="6" name="Picture 5" descr="gnu_emblem_combo_kr_en.png"/>
           <p:cNvPicPr>
             <a:picLocks noChangeAspect="1"/>
           </p:cNvPicPr>
@@ -10815,7 +10815,7 @@
         <p:spPr>
           <a:xfrm>
             <a:off x="9357055" y="384048"/>
-            <a:ext cx="2532185" cy="329184"/>
+            <a:ext cx="1359455" cy="329184"/>
           </a:xfrm>
           <a:prstGeom prst="rect">
             <a:avLst/>
@@ -11822,7 +11822,7 @@
       </p:sp>
       <p:pic>
         <p:nvPicPr>
-          <p:cNvPr id="6" name="Picture 5" descr="gnu_signature_kr_en.png"/>
+          <p:cNvPr id="6" name="Picture 5" descr="gnu_emblem_combo_kr_en.png"/>
           <p:cNvPicPr>
             <a:picLocks noChangeAspect="1"/>
           </p:cNvPicPr>
@@ -11837,7 +11837,7 @@
         <p:spPr>
           <a:xfrm>
             <a:off x="9357055" y="384048"/>
-            <a:ext cx="2532185" cy="329184"/>
+            <a:ext cx="1359455" cy="329184"/>
           </a:xfrm>
           <a:prstGeom prst="rect">
             <a:avLst/>
@@ -12433,7 +12433,7 @@
       </p:sp>
       <p:pic>
         <p:nvPicPr>
-          <p:cNvPr id="6" name="Picture 5" descr="gnu_signature_kr_en.png"/>
+          <p:cNvPr id="6" name="Picture 5" descr="gnu_emblem_combo_kr_en.png"/>
           <p:cNvPicPr>
             <a:picLocks noChangeAspect="1"/>
           </p:cNvPicPr>
@@ -12448,7 +12448,7 @@
         <p:spPr>
           <a:xfrm>
             <a:off x="9357055" y="384048"/>
-            <a:ext cx="2532185" cy="329184"/>
+            <a:ext cx="1359455" cy="329184"/>
           </a:xfrm>
           <a:prstGeom prst="rect">
             <a:avLst/>
@@ -12948,7 +12948,7 @@
       </p:sp>
       <p:pic>
         <p:nvPicPr>
-          <p:cNvPr id="3" name="Picture 2" descr="gnu_signature_kr_en_white.png"/>
+          <p:cNvPr id="3" name="Picture 2" descr="gnu_emblem_combo_kr_en_white.png"/>
           <p:cNvPicPr>
             <a:picLocks noChangeAspect="1"/>
           </p:cNvPicPr>
@@ -12963,7 +12963,7 @@
         <p:spPr>
           <a:xfrm>
             <a:off x="4754880" y="1463040"/>
-            <a:ext cx="4220308" cy="548640"/>
+            <a:ext cx="2265758" cy="548640"/>
           </a:xfrm>
           <a:prstGeom prst="rect">
             <a:avLst/>
@@ -13312,7 +13312,7 @@
       </p:sp>
       <p:pic>
         <p:nvPicPr>
-          <p:cNvPr id="6" name="Picture 5" descr="gnu_signature_kr_en.png"/>
+          <p:cNvPr id="6" name="Picture 5" descr="gnu_emblem_combo_kr_en.png"/>
           <p:cNvPicPr>
             <a:picLocks noChangeAspect="1"/>
           </p:cNvPicPr>
@@ -13327,7 +13327,7 @@
         <p:spPr>
           <a:xfrm>
             <a:off x="9357055" y="384048"/>
-            <a:ext cx="2532185" cy="329184"/>
+            <a:ext cx="1359455" cy="329184"/>
           </a:xfrm>
           <a:prstGeom prst="rect">
             <a:avLst/>
@@ -13904,7 +13904,7 @@
       </p:sp>
       <p:pic>
         <p:nvPicPr>
-          <p:cNvPr id="6" name="Picture 5" descr="gnu_signature_kr_en.png"/>
+          <p:cNvPr id="6" name="Picture 5" descr="gnu_emblem_combo_kr_en.png"/>
           <p:cNvPicPr>
             <a:picLocks noChangeAspect="1"/>
           </p:cNvPicPr>
@@ -13919,7 +13919,7 @@
         <p:spPr>
           <a:xfrm>
             <a:off x="9357055" y="384048"/>
-            <a:ext cx="2532185" cy="329184"/>
+            <a:ext cx="1359455" cy="329184"/>
           </a:xfrm>
           <a:prstGeom prst="rect">
             <a:avLst/>
@@ -14427,7 +14427,7 @@
       </p:sp>
       <p:pic>
         <p:nvPicPr>
-          <p:cNvPr id="6" name="Picture 5" descr="gnu_signature_kr_en.png"/>
+          <p:cNvPr id="6" name="Picture 5" descr="gnu_emblem_combo_kr_en.png"/>
           <p:cNvPicPr>
             <a:picLocks noChangeAspect="1"/>
           </p:cNvPicPr>
@@ -14442,7 +14442,7 @@
         <p:spPr>
           <a:xfrm>
             <a:off x="9357055" y="384048"/>
-            <a:ext cx="2532185" cy="329184"/>
+            <a:ext cx="1359455" cy="329184"/>
           </a:xfrm>
           <a:prstGeom prst="rect">
             <a:avLst/>
@@ -15430,7 +15430,7 @@
       </p:sp>
       <p:pic>
         <p:nvPicPr>
-          <p:cNvPr id="6" name="Picture 5" descr="gnu_signature_kr_en.png"/>
+          <p:cNvPr id="6" name="Picture 5" descr="gnu_emblem_combo_kr_en.png"/>
           <p:cNvPicPr>
             <a:picLocks noChangeAspect="1"/>
           </p:cNvPicPr>
@@ -15445,7 +15445,7 @@
         <p:spPr>
           <a:xfrm>
             <a:off x="9357055" y="384048"/>
-            <a:ext cx="2532185" cy="329184"/>
+            <a:ext cx="1359455" cy="329184"/>
           </a:xfrm>
           <a:prstGeom prst="rect">
             <a:avLst/>
@@ -16958,7 +16958,7 @@
       </p:sp>
       <p:pic>
         <p:nvPicPr>
-          <p:cNvPr id="6" name="Picture 5" descr="gnu_signature_kr_en.png"/>
+          <p:cNvPr id="6" name="Picture 5" descr="gnu_emblem_combo_kr_en.png"/>
           <p:cNvPicPr>
             <a:picLocks noChangeAspect="1"/>
           </p:cNvPicPr>
@@ -16973,7 +16973,7 @@
         <p:spPr>
           <a:xfrm>
             <a:off x="9357055" y="384048"/>
-            <a:ext cx="2532185" cy="329184"/>
+            <a:ext cx="1359455" cy="329184"/>
           </a:xfrm>
           <a:prstGeom prst="rect">
             <a:avLst/>
@@ -18129,7 +18129,7 @@
       </p:sp>
       <p:pic>
         <p:nvPicPr>
-          <p:cNvPr id="6" name="Picture 5" descr="gnu_signature_kr_en.png"/>
+          <p:cNvPr id="6" name="Picture 5" descr="gnu_emblem_combo_kr_en.png"/>
           <p:cNvPicPr>
             <a:picLocks noChangeAspect="1"/>
           </p:cNvPicPr>
@@ -18144,7 +18144,7 @@
         <p:spPr>
           <a:xfrm>
             <a:off x="9357055" y="384048"/>
-            <a:ext cx="2532185" cy="329184"/>
+            <a:ext cx="1359455" cy="329184"/>
           </a:xfrm>
           <a:prstGeom prst="rect">
             <a:avLst/>
@@ -18556,7 +18556,7 @@
       </p:sp>
       <p:pic>
         <p:nvPicPr>
-          <p:cNvPr id="6" name="Picture 5" descr="gnu_signature_kr_en.png"/>
+          <p:cNvPr id="6" name="Picture 5" descr="gnu_emblem_combo_kr_en.png"/>
           <p:cNvPicPr>
             <a:picLocks noChangeAspect="1"/>
           </p:cNvPicPr>
@@ -18571,7 +18571,7 @@
         <p:spPr>
           <a:xfrm>
             <a:off x="9357055" y="384048"/>
-            <a:ext cx="2532185" cy="329184"/>
+            <a:ext cx="1359455" cy="329184"/>
           </a:xfrm>
           <a:prstGeom prst="rect">
             <a:avLst/>
